--- a/index/designs/y7-l12/l5-time-transport-synthesis/l5-time-transport-synthesis.pptx
+++ b/index/designs/y7-l12/l5-time-transport-synthesis/l5-time-transport-synthesis.pptx
@@ -2117,9 +2117,6 @@
               </a:rPr>
               <a:t>几点坐车</a:t>
             </a:r>
-            <a:pPr algn="ctr" indent="0" marL="0">
-              <a:buNone/>
-            </a:pPr>
             <a:r>
               <a:rPr lang="en-US" sz="5600" b="1" dirty="0">
                 <a:solidFill>
@@ -4479,12 +4476,6 @@
               </a:rPr>
               <a:t>Write one sentence about </a:t>
             </a:r>
-            <a:pPr algn="l" indent="0" marL="0">
-              <a:lnSpc>
-                <a:spcPts val="1560"/>
-              </a:lnSpc>
-              <a:buNone/>
-            </a:pPr>
             <a:r>
               <a:rPr lang="en-US" sz="1200" b="1" dirty="0">
                 <a:solidFill>
@@ -4496,12 +4487,6 @@
               </a:rPr>
               <a:t>your own commute</a:t>
             </a:r>
-            <a:pPr algn="l" indent="0" marL="0">
-              <a:lnSpc>
-                <a:spcPts val="1560"/>
-              </a:lnSpc>
-              <a:buNone/>
-            </a:pPr>
             <a:r>
               <a:rPr lang="en-US" sz="1200" dirty="0">
                 <a:solidFill>
@@ -4886,15 +4871,6 @@
               </a:rPr>
               <a:t>You can now combine </a:t>
             </a:r>
-            <a:pPr algn="ctr" indent="0" marL="0">
-              <a:lnSpc>
-                <a:spcPts val="1960"/>
-              </a:lnSpc>
-              <a:spcAft>
-                <a:spcPts val="800"/>
-              </a:spcAft>
-              <a:buNone/>
-            </a:pPr>
             <a:r>
               <a:rPr lang="en-US" sz="1400" b="1" dirty="0">
                 <a:solidFill>
@@ -4906,15 +4882,6 @@
               </a:rPr>
               <a:t>time + transport + activity</a:t>
             </a:r>
-            <a:pPr algn="ctr" indent="0" marL="0">
-              <a:lnSpc>
-                <a:spcPts val="1960"/>
-              </a:lnSpc>
-              <a:spcAft>
-                <a:spcPts val="800"/>
-              </a:spcAft>
-              <a:buNone/>
-            </a:pPr>
             <a:r>
               <a:rPr lang="en-US" sz="1400" dirty="0">
                 <a:solidFill>
@@ -5133,15 +5100,6 @@
               </a:rPr>
               <a:t>Today: </a:t>
             </a:r>
-            <a:pPr algn="ctr" indent="0" marL="0">
-              <a:lnSpc>
-                <a:spcPts val="1920"/>
-              </a:lnSpc>
-              <a:spcBef>
-                <a:spcPts val="800"/>
-              </a:spcBef>
-              <a:buNone/>
-            </a:pPr>
             <a:r>
               <a:rPr lang="en-US" sz="1200" b="1" dirty="0">
                 <a:solidFill>
@@ -5153,15 +5111,6 @@
               </a:rPr>
               <a:t>Subject + (每天) + Time + 坐/走路/开车 + Activity</a:t>
             </a:r>
-            <a:pPr algn="ctr" indent="0" marL="0">
-              <a:lnSpc>
-                <a:spcPts val="1920"/>
-              </a:lnSpc>
-              <a:spcBef>
-                <a:spcPts val="800"/>
-              </a:spcBef>
-              <a:buNone/>
-            </a:pPr>
             <a:endParaRPr lang="en-US" sz="1200" dirty="0"/>
           </a:p>
           <a:p>
@@ -7014,9 +6963,6 @@
               </a:rPr>
               <a:t>We are learning to combine </a:t>
             </a:r>
-            <a:pPr algn="l" indent="0" marL="0">
-              <a:buNone/>
-            </a:pPr>
             <a:r>
               <a:rPr lang="en-US" sz="1500" b="1" dirty="0">
                 <a:solidFill>
@@ -7028,9 +6974,6 @@
               </a:rPr>
               <a:t>time expressions</a:t>
             </a:r>
-            <a:pPr algn="l" indent="0" marL="0">
-              <a:buNone/>
-            </a:pPr>
             <a:r>
               <a:rPr lang="en-US" sz="1500" dirty="0">
                 <a:solidFill>
@@ -7042,9 +6985,6 @@
               </a:rPr>
               <a:t> with </a:t>
             </a:r>
-            <a:pPr algn="l" indent="0" marL="0">
-              <a:buNone/>
-            </a:pPr>
             <a:r>
               <a:rPr lang="en-US" sz="1500" b="1" dirty="0">
                 <a:solidFill>
@@ -7056,9 +6996,6 @@
               </a:rPr>
               <a:t>transport</a:t>
             </a:r>
-            <a:pPr algn="l" indent="0" marL="0">
-              <a:buNone/>
-            </a:pPr>
             <a:r>
               <a:rPr lang="en-US" sz="1500" dirty="0">
                 <a:solidFill>
@@ -7182,9 +7119,6 @@
               </a:rPr>
               <a:t>I can say a sentence with </a:t>
             </a:r>
-            <a:pPr algn="l" indent="0" marL="0">
-              <a:buNone/>
-            </a:pPr>
             <a:r>
               <a:rPr lang="en-US" sz="1400" b="1" dirty="0">
                 <a:solidFill>
@@ -7196,9 +7130,6 @@
               </a:rPr>
               <a:t>time + transport + activity</a:t>
             </a:r>
-            <a:pPr algn="l" indent="0" marL="0">
-              <a:buNone/>
-            </a:pPr>
             <a:r>
               <a:rPr lang="en-US" sz="1400" dirty="0">
                 <a:solidFill>
@@ -7361,9 +7292,6 @@
               </a:rPr>
               <a:t>I can </a:t>
             </a:r>
-            <a:pPr algn="l" indent="0" marL="0">
-              <a:buNone/>
-            </a:pPr>
             <a:r>
               <a:rPr lang="en-US" sz="1400" b="1" dirty="0">
                 <a:solidFill>
@@ -7375,9 +7303,6 @@
               </a:rPr>
               <a:t>listen and match</a:t>
             </a:r>
-            <a:pPr algn="l" indent="0" marL="0">
-              <a:buNone/>
-            </a:pPr>
             <a:r>
               <a:rPr lang="en-US" sz="1400" dirty="0">
                 <a:solidFill>
@@ -7540,9 +7465,6 @@
               </a:rPr>
               <a:t>I can build a sentence in the </a:t>
             </a:r>
-            <a:pPr algn="l" indent="0" marL="0">
-              <a:buNone/>
-            </a:pPr>
             <a:r>
               <a:rPr lang="en-US" sz="1400" b="1" dirty="0">
                 <a:solidFill>
@@ -7554,9 +7476,6 @@
               </a:rPr>
               <a:t>correct word order</a:t>
             </a:r>
-            <a:pPr algn="l" indent="0" marL="0">
-              <a:buNone/>
-            </a:pPr>
             <a:r>
               <a:rPr lang="en-US" sz="1400" dirty="0">
                 <a:solidFill>
@@ -8011,9 +7930,6 @@
               </a:rPr>
               <a:t>Subject </a:t>
             </a:r>
-            <a:pPr algn="l" indent="0" marL="0">
-              <a:buNone/>
-            </a:pPr>
             <a:r>
               <a:rPr lang="en-US" sz="1400" b="1" dirty="0">
                 <a:solidFill>
@@ -8025,9 +7941,6 @@
               </a:rPr>
               <a:t>+</a:t>
             </a:r>
-            <a:pPr algn="l" indent="0" marL="0">
-              <a:buNone/>
-            </a:pPr>
             <a:r>
               <a:rPr lang="en-US" sz="1400" dirty="0">
                 <a:solidFill>
@@ -8039,9 +7952,6 @@
               </a:rPr>
               <a:t> (每天) </a:t>
             </a:r>
-            <a:pPr algn="l" indent="0" marL="0">
-              <a:buNone/>
-            </a:pPr>
             <a:r>
               <a:rPr lang="en-US" sz="1400" b="1" dirty="0">
                 <a:solidFill>
@@ -8053,9 +7963,6 @@
               </a:rPr>
               <a:t>+</a:t>
             </a:r>
-            <a:pPr algn="l" indent="0" marL="0">
-              <a:buNone/>
-            </a:pPr>
             <a:r>
               <a:rPr lang="en-US" sz="1400" dirty="0">
                 <a:solidFill>
@@ -8067,9 +7974,6 @@
               </a:rPr>
               <a:t> Time </a:t>
             </a:r>
-            <a:pPr algn="l" indent="0" marL="0">
-              <a:buNone/>
-            </a:pPr>
             <a:r>
               <a:rPr lang="en-US" sz="1400" b="1" dirty="0">
                 <a:solidFill>
@@ -8081,9 +7985,6 @@
               </a:rPr>
               <a:t>+</a:t>
             </a:r>
-            <a:pPr algn="l" indent="0" marL="0">
-              <a:buNone/>
-            </a:pPr>
             <a:r>
               <a:rPr lang="en-US" sz="1400" dirty="0">
                 <a:solidFill>
@@ -8095,9 +7996,6 @@
               </a:rPr>
               <a:t> 坐/走路/开车 </a:t>
             </a:r>
-            <a:pPr algn="l" indent="0" marL="0">
-              <a:buNone/>
-            </a:pPr>
             <a:r>
               <a:rPr lang="en-US" sz="1400" b="1" dirty="0">
                 <a:solidFill>
@@ -8109,9 +8007,6 @@
               </a:rPr>
               <a:t>+</a:t>
             </a:r>
-            <a:pPr algn="l" indent="0" marL="0">
-              <a:buNone/>
-            </a:pPr>
             <a:r>
               <a:rPr lang="en-US" sz="1400" dirty="0">
                 <a:solidFill>
@@ -12022,9 +11917,6 @@
               </a:rPr>
               <a:t>Fix the word order: </a:t>
             </a:r>
-            <a:pPr algn="l" indent="0" marL="0">
-              <a:buNone/>
-            </a:pPr>
             <a:r>
               <a:rPr lang="en-US" sz="1300" b="1" dirty="0">
                 <a:solidFill>
@@ -12146,9 +12038,6 @@
               </a:rPr>
               <a:t>Make a sentence: </a:t>
             </a:r>
-            <a:pPr algn="l" indent="0" marL="0">
-              <a:buNone/>
-            </a:pPr>
             <a:r>
               <a:rPr lang="en-US" sz="1300" b="1" dirty="0">
                 <a:solidFill>
@@ -12160,9 +12049,6 @@
               </a:rPr>
               <a:t>Mum, 8:15, subway, work.</a:t>
             </a:r>
-            <a:pPr algn="l" indent="0" marL="0">
-              <a:buNone/>
-            </a:pPr>
             <a:r>
               <a:rPr lang="en-US" sz="1300" dirty="0">
                 <a:solidFill>
@@ -12988,9 +12874,6 @@
               </a:rPr>
               <a:t>Fix the word order: </a:t>
             </a:r>
-            <a:pPr algn="l" indent="0" marL="0">
-              <a:buNone/>
-            </a:pPr>
             <a:r>
               <a:rPr lang="en-US" sz="1250" b="1" dirty="0">
                 <a:solidFill>
@@ -13190,9 +13073,6 @@
               </a:rPr>
               <a:t>Make a sentence: </a:t>
             </a:r>
-            <a:pPr algn="l" indent="0" marL="0">
-              <a:buNone/>
-            </a:pPr>
             <a:r>
               <a:rPr lang="en-US" sz="1250" b="1" dirty="0">
                 <a:solidFill>
@@ -14235,9 +14115,6 @@
               </a:rPr>
               <a:t>___ </a:t>
             </a:r>
-            <a:pPr algn="ctr" indent="0" marL="0">
-              <a:buNone/>
-            </a:pPr>
             <a:r>
               <a:rPr lang="en-US" sz="1600" b="1" dirty="0">
                 <a:solidFill>
@@ -14249,9 +14126,6 @@
               </a:rPr>
               <a:t>点</a:t>
             </a:r>
-            <a:pPr algn="ctr" indent="0" marL="0">
-              <a:buNone/>
-            </a:pPr>
             <a:r>
               <a:rPr lang="en-US" sz="1600" dirty="0">
                 <a:solidFill>
